--- a/pierwsze spojrzenie.pptx
+++ b/pierwsze spojrzenie.pptx
@@ -122,7 +122,7 @@
 <file path=ppt/charts/chart1.xml><?xml version="1.0" encoding="utf-8"?>
 <c:chartSpace xmlns:c="http://schemas.openxmlformats.org/drawingml/2006/chart" xmlns:a="http://schemas.openxmlformats.org/drawingml/2006/main" xmlns:r="http://schemas.openxmlformats.org/officeDocument/2006/relationships" xmlns:c16r2="http://schemas.microsoft.com/office/drawing/2015/06/chart">
   <c:date1904 val="0"/>
-  <c:lang val="en-US"/>
+  <c:lang val="pl-PL"/>
   <c:roundedCorners val="0"/>
   <mc:AlternateContent xmlns:mc="http://schemas.openxmlformats.org/markup-compatibility/2006">
     <mc:Choice xmlns:c14="http://schemas.microsoft.com/office/drawing/2007/8/2/chart" Requires="c14">
@@ -267,143 +267,143 @@
           </c:dLbls>
           <c:cat>
             <c:strRef>
-              <c:f>'zejscia WORK 2'!$AA$2:$AA$22</c:f>
+              <c:f>'zejscia WORK 2'!$M$2:$M$22</c:f>
               <c:strCache>
                 <c:ptCount val="21"/>
                 <c:pt idx="0">
-                  <c:v>19.05.2017 1</c:v>
+                  <c:v>21.02.2016 -1</c:v>
                 </c:pt>
                 <c:pt idx="1">
-                  <c:v>19.05.2017 2</c:v>
+                  <c:v>21.02.2016 -2</c:v>
                 </c:pt>
                 <c:pt idx="2">
-                  <c:v>19.05.2017 3</c:v>
+                  <c:v>21.02.2016 -3</c:v>
                 </c:pt>
                 <c:pt idx="3">
-                  <c:v>20.05.2017 1</c:v>
+                  <c:v>22.02.2016 -1</c:v>
                 </c:pt>
                 <c:pt idx="4">
-                  <c:v>20.05.2017 2</c:v>
+                  <c:v>22.02.2016 -2</c:v>
                 </c:pt>
                 <c:pt idx="5">
-                  <c:v>20.05.2017 3</c:v>
+                  <c:v>22.02.2016 -3</c:v>
                 </c:pt>
                 <c:pt idx="6">
-                  <c:v>21.05.2017 1</c:v>
+                  <c:v>23.02.2016 -1</c:v>
                 </c:pt>
                 <c:pt idx="7">
-                  <c:v>21.05.2017 2</c:v>
+                  <c:v>23.02.2016 -2</c:v>
                 </c:pt>
                 <c:pt idx="8">
-                  <c:v>21.05.2017 3</c:v>
+                  <c:v>23.02.2016 -3</c:v>
                 </c:pt>
                 <c:pt idx="9">
-                  <c:v>22.05.2017 1</c:v>
+                  <c:v>24.02.2016 -1</c:v>
                 </c:pt>
                 <c:pt idx="10">
-                  <c:v>22.05.2017 2</c:v>
+                  <c:v>24.02.2016 -2</c:v>
                 </c:pt>
                 <c:pt idx="11">
-                  <c:v>22.05.2017 3</c:v>
+                  <c:v>24.02.2016 -3</c:v>
                 </c:pt>
                 <c:pt idx="12">
-                  <c:v>23.05.2017 1</c:v>
+                  <c:v>25.02.2016 -1</c:v>
                 </c:pt>
                 <c:pt idx="13">
-                  <c:v>23.05.2017 2</c:v>
+                  <c:v>25.02.2016 -2</c:v>
                 </c:pt>
                 <c:pt idx="14">
-                  <c:v>23.05.2017 3</c:v>
+                  <c:v>25.02.2016 -3</c:v>
                 </c:pt>
                 <c:pt idx="15">
-                  <c:v>24.05.2017 1</c:v>
+                  <c:v>26.02.2016 -1</c:v>
                 </c:pt>
                 <c:pt idx="16">
-                  <c:v>24.05.2017 2</c:v>
+                  <c:v>26.02.2016 -2</c:v>
                 </c:pt>
                 <c:pt idx="17">
-                  <c:v>24.05.2017 3</c:v>
+                  <c:v>26.02.2016 -3</c:v>
                 </c:pt>
                 <c:pt idx="18">
-                  <c:v>25.05.2017 1</c:v>
+                  <c:v>27.02.2016 -1</c:v>
                 </c:pt>
                 <c:pt idx="19">
-                  <c:v>25.05.2017 2</c:v>
+                  <c:v>27.02.2016 -2</c:v>
                 </c:pt>
                 <c:pt idx="20">
-                  <c:v>25.05.2017 3</c:v>
+                  <c:v>27.02.2016 -3</c:v>
                 </c:pt>
               </c:strCache>
             </c:strRef>
           </c:cat>
           <c:val>
             <c:numRef>
-              <c:f>'zejscia WORK 2'!$AB$2:$AB$22</c:f>
+              <c:f>'zejscia WORK 2'!$P$2:$P$22</c:f>
               <c:numCache>
                 <c:formatCode>0.00</c:formatCode>
                 <c:ptCount val="21"/>
                 <c:pt idx="0">
-                  <c:v>76.890756302521012</c:v>
+                  <c:v>92.700729927007302</c:v>
                 </c:pt>
                 <c:pt idx="1">
-                  <c:v>91.428571428571431</c:v>
+                  <c:v>92.543859649122808</c:v>
                 </c:pt>
                 <c:pt idx="2">
-                  <c:v>96.529284164858993</c:v>
+                  <c:v>93.388429752066116</c:v>
                 </c:pt>
                 <c:pt idx="3">
-                  <c:v>97.552447552447546</c:v>
+                  <c:v>91.880341880341874</c:v>
                 </c:pt>
                 <c:pt idx="4">
-                  <c:v>93.686868686868678</c:v>
+                  <c:v>95.121951219512198</c:v>
                 </c:pt>
                 <c:pt idx="5">
-                  <c:v>91.153846153846146</c:v>
+                  <c:v>94.623655913978496</c:v>
                 </c:pt>
                 <c:pt idx="6">
-                  <c:v>93.872549019607845</c:v>
+                  <c:v>94.360902255639104</c:v>
                 </c:pt>
                 <c:pt idx="7">
-                  <c:v>95.882352941176478</c:v>
+                  <c:v>93.488372093023258</c:v>
                 </c:pt>
                 <c:pt idx="8">
-                  <c:v>92.757660167130922</c:v>
+                  <c:v>88.571428571428569</c:v>
                 </c:pt>
                 <c:pt idx="9">
-                  <c:v>97.002724795640333</c:v>
+                  <c:v>92.405063291139243</c:v>
                 </c:pt>
                 <c:pt idx="10">
-                  <c:v>98.730158730158735</c:v>
+                  <c:v>90.526315789473685</c:v>
                 </c:pt>
                 <c:pt idx="11">
-                  <c:v>99.120879120879124</c:v>
+                  <c:v>95.020746887966794</c:v>
                 </c:pt>
                 <c:pt idx="12">
-                  <c:v>96.498905908096276</c:v>
+                  <c:v>94.977168949771681</c:v>
                 </c:pt>
                 <c:pt idx="13">
-                  <c:v>94.308943089430898</c:v>
+                  <c:v>92.712550607287454</c:v>
                 </c:pt>
                 <c:pt idx="14">
-                  <c:v>92.533936651583716</c:v>
+                  <c:v>94.711538461538453</c:v>
                 </c:pt>
                 <c:pt idx="15">
-                  <c:v>95.964125560538122</c:v>
+                  <c:v>93.95348837209302</c:v>
                 </c:pt>
                 <c:pt idx="16">
-                  <c:v>90.163934426229503</c:v>
+                  <c:v>93.600000000000009</c:v>
                 </c:pt>
                 <c:pt idx="17">
-                  <c:v>94.279176201372991</c:v>
+                  <c:v>91.699604743083</c:v>
                 </c:pt>
                 <c:pt idx="18">
-                  <c:v>92.643678160919535</c:v>
+                  <c:v>90.714285714285708</c:v>
                 </c:pt>
                 <c:pt idx="19">
-                  <c:v>98.205128205128204</c:v>
+                  <c:v>95.360824742268051</c:v>
                 </c:pt>
                 <c:pt idx="20">
-                  <c:v>94.878048780487802</c:v>
+                  <c:v>91.803278688524586</c:v>
                 </c:pt>
               </c:numCache>
             </c:numRef>
@@ -411,7 +411,7 @@
           <c:smooth val="0"/>
           <c:extLst>
             <c:ext xmlns:c16="http://schemas.microsoft.com/office/drawing/2014/chart" uri="{C3380CC4-5D6E-409C-BE32-E72D297353CC}">
-              <c16:uniqueId val="{00000000-318E-4429-A24E-737AD7D77A4D}"/>
+              <c16:uniqueId val="{00000000-4D43-4B14-BA95-C7AEF4CBE8E4}"/>
             </c:ext>
           </c:extLst>
         </c:ser>
@@ -610,7 +610,7 @@
 <file path=ppt/charts/chart2.xml><?xml version="1.0" encoding="utf-8"?>
 <c:chartSpace xmlns:c="http://schemas.openxmlformats.org/drawingml/2006/chart" xmlns:a="http://schemas.openxmlformats.org/drawingml/2006/main" xmlns:r="http://schemas.openxmlformats.org/officeDocument/2006/relationships" xmlns:c16r2="http://schemas.microsoft.com/office/drawing/2015/06/chart">
   <c:date1904 val="0"/>
-  <c:lang val="en-US"/>
+  <c:lang val="pl-PL"/>
   <c:roundedCorners val="0"/>
   <mc:AlternateContent xmlns:mc="http://schemas.openxmlformats.org/markup-compatibility/2006">
     <mc:Choice xmlns:c14="http://schemas.microsoft.com/office/drawing/2007/8/2/chart" Requires="c14">
@@ -641,422 +641,10 @@
               </a:defRPr>
             </a:pPr>
             <a:r>
-              <a:rPr lang="pl-PL" sz="2800" dirty="0"/>
-              <a:t>Procentowy podział czasu straconego na przestoje</a:t>
-            </a:r>
-            <a:endParaRPr lang="en-US" sz="2800" dirty="0"/>
-          </a:p>
-        </c:rich>
-      </c:tx>
-      <c:layout>
-        <c:manualLayout>
-          <c:xMode val="edge"/>
-          <c:yMode val="edge"/>
-          <c:x val="0.10786045556320398"/>
-          <c:y val="2.8373981224930994E-4"/>
-        </c:manualLayout>
-      </c:layout>
-      <c:overlay val="0"/>
-      <c:spPr>
-        <a:noFill/>
-        <a:ln>
-          <a:noFill/>
-        </a:ln>
-        <a:effectLst/>
-      </c:spPr>
-      <c:txPr>
-        <a:bodyPr rot="0" spcFirstLastPara="1" vertOverflow="ellipsis" vert="horz" wrap="square" anchor="ctr" anchorCtr="1"/>
-        <a:lstStyle/>
-        <a:p>
-          <a:pPr>
-            <a:defRPr sz="1400" b="0" i="0" u="none" strike="noStrike" kern="1200" spc="0" baseline="0">
-              <a:solidFill>
-                <a:schemeClr val="tx1">
-                  <a:lumMod val="65000"/>
-                  <a:lumOff val="35000"/>
-                </a:schemeClr>
-              </a:solidFill>
-              <a:latin typeface="+mn-lt"/>
-              <a:ea typeface="+mn-ea"/>
-              <a:cs typeface="+mn-cs"/>
-            </a:defRPr>
-          </a:pPr>
-          <a:endParaRPr lang="en-US"/>
-        </a:p>
-      </c:txPr>
-    </c:title>
-    <c:autoTitleDeleted val="0"/>
-    <c:plotArea>
-      <c:layout/>
-      <c:pieChart>
-        <c:varyColors val="1"/>
-        <c:ser>
-          <c:idx val="0"/>
-          <c:order val="0"/>
-          <c:dPt>
-            <c:idx val="0"/>
-            <c:bubble3D val="0"/>
-            <c:spPr>
-              <a:solidFill>
-                <a:schemeClr val="accent1"/>
-              </a:solidFill>
-              <a:ln w="19050">
-                <a:solidFill>
-                  <a:schemeClr val="lt1"/>
-                </a:solidFill>
-              </a:ln>
-              <a:effectLst/>
-            </c:spPr>
-            <c:extLst>
-              <c:ext xmlns:c16="http://schemas.microsoft.com/office/drawing/2014/chart" uri="{C3380CC4-5D6E-409C-BE32-E72D297353CC}">
-                <c16:uniqueId val="{00000001-216B-4BD6-8A48-1EACE5785171}"/>
-              </c:ext>
-            </c:extLst>
-          </c:dPt>
-          <c:dPt>
-            <c:idx val="1"/>
-            <c:bubble3D val="0"/>
-            <c:spPr>
-              <a:solidFill>
-                <a:schemeClr val="accent2"/>
-              </a:solidFill>
-              <a:ln w="19050">
-                <a:solidFill>
-                  <a:schemeClr val="lt1"/>
-                </a:solidFill>
-              </a:ln>
-              <a:effectLst/>
-            </c:spPr>
-            <c:extLst>
-              <c:ext xmlns:c16="http://schemas.microsoft.com/office/drawing/2014/chart" uri="{C3380CC4-5D6E-409C-BE32-E72D297353CC}">
-                <c16:uniqueId val="{00000003-216B-4BD6-8A48-1EACE5785171}"/>
-              </c:ext>
-            </c:extLst>
-          </c:dPt>
-          <c:dPt>
-            <c:idx val="2"/>
-            <c:bubble3D val="0"/>
-            <c:spPr>
-              <a:solidFill>
-                <a:schemeClr val="accent3"/>
-              </a:solidFill>
-              <a:ln w="19050">
-                <a:solidFill>
-                  <a:schemeClr val="lt1"/>
-                </a:solidFill>
-              </a:ln>
-              <a:effectLst/>
-            </c:spPr>
-            <c:extLst>
-              <c:ext xmlns:c16="http://schemas.microsoft.com/office/drawing/2014/chart" uri="{C3380CC4-5D6E-409C-BE32-E72D297353CC}">
-                <c16:uniqueId val="{00000005-216B-4BD6-8A48-1EACE5785171}"/>
-              </c:ext>
-            </c:extLst>
-          </c:dPt>
-          <c:dPt>
-            <c:idx val="3"/>
-            <c:bubble3D val="0"/>
-            <c:spPr>
-              <a:solidFill>
-                <a:schemeClr val="accent4"/>
-              </a:solidFill>
-              <a:ln w="19050">
-                <a:solidFill>
-                  <a:schemeClr val="lt1"/>
-                </a:solidFill>
-              </a:ln>
-              <a:effectLst/>
-            </c:spPr>
-            <c:extLst>
-              <c:ext xmlns:c16="http://schemas.microsoft.com/office/drawing/2014/chart" uri="{C3380CC4-5D6E-409C-BE32-E72D297353CC}">
-                <c16:uniqueId val="{00000007-216B-4BD6-8A48-1EACE5785171}"/>
-              </c:ext>
-            </c:extLst>
-          </c:dPt>
-          <c:dPt>
-            <c:idx val="4"/>
-            <c:bubble3D val="0"/>
-            <c:spPr>
-              <a:solidFill>
-                <a:schemeClr val="accent6"/>
-              </a:solidFill>
-              <a:ln w="19050">
-                <a:solidFill>
-                  <a:schemeClr val="lt1"/>
-                </a:solidFill>
-              </a:ln>
-              <a:effectLst/>
-            </c:spPr>
-            <c:extLst>
-              <c:ext xmlns:c16="http://schemas.microsoft.com/office/drawing/2014/chart" uri="{C3380CC4-5D6E-409C-BE32-E72D297353CC}">
-                <c16:uniqueId val="{00000009-216B-4BD6-8A48-1EACE5785171}"/>
-              </c:ext>
-            </c:extLst>
-          </c:dPt>
-          <c:dLbls>
-            <c:dLbl>
-              <c:idx val="0"/>
-              <c:layout>
-                <c:manualLayout>
-                  <c:x val="-0.16173225717116518"/>
-                  <c:y val="-0.1835337614413414"/>
-                </c:manualLayout>
-              </c:layout>
-              <c:dLblPos val="bestFit"/>
-              <c:showLegendKey val="0"/>
-              <c:showVal val="1"/>
-              <c:showCatName val="0"/>
-              <c:showSerName val="0"/>
-              <c:showPercent val="0"/>
-              <c:showBubbleSize val="0"/>
-              <c:extLst>
-                <c:ext xmlns:c15="http://schemas.microsoft.com/office/drawing/2012/chart" uri="{CE6537A1-D6FC-4f65-9D91-7224C49458BB}"/>
-                <c:ext xmlns:c16="http://schemas.microsoft.com/office/drawing/2014/chart" uri="{C3380CC4-5D6E-409C-BE32-E72D297353CC}">
-                  <c16:uniqueId val="{00000001-216B-4BD6-8A48-1EACE5785171}"/>
-                </c:ext>
-              </c:extLst>
-            </c:dLbl>
-            <c:spPr>
-              <a:noFill/>
-              <a:ln>
-                <a:noFill/>
-              </a:ln>
-              <a:effectLst/>
-            </c:spPr>
-            <c:txPr>
-              <a:bodyPr rot="0" spcFirstLastPara="1" vertOverflow="ellipsis" vert="horz" wrap="square" lIns="38100" tIns="19050" rIns="38100" bIns="19050" anchor="ctr" anchorCtr="1">
-                <a:spAutoFit/>
-              </a:bodyPr>
-              <a:lstStyle/>
-              <a:p>
-                <a:pPr>
-                  <a:defRPr sz="1800" b="1" i="0" u="none" strike="noStrike" kern="1200" baseline="0">
-                    <a:solidFill>
-                      <a:schemeClr val="tx1">
-                        <a:lumMod val="75000"/>
-                        <a:lumOff val="25000"/>
-                      </a:schemeClr>
-                    </a:solidFill>
-                    <a:latin typeface="+mn-lt"/>
-                    <a:ea typeface="+mn-ea"/>
-                    <a:cs typeface="+mn-cs"/>
-                  </a:defRPr>
-                </a:pPr>
-                <a:endParaRPr lang="en-US"/>
-              </a:p>
-            </c:txPr>
-            <c:dLblPos val="bestFit"/>
-            <c:showLegendKey val="0"/>
-            <c:showVal val="1"/>
-            <c:showCatName val="0"/>
-            <c:showSerName val="0"/>
-            <c:showPercent val="0"/>
-            <c:showBubbleSize val="0"/>
-            <c:showLeaderLines val="1"/>
-            <c:leaderLines>
-              <c:spPr>
-                <a:ln w="9525" cap="flat" cmpd="sng" algn="ctr">
-                  <a:solidFill>
-                    <a:schemeClr val="tx1">
-                      <a:lumMod val="35000"/>
-                      <a:lumOff val="65000"/>
-                    </a:schemeClr>
-                  </a:solidFill>
-                  <a:round/>
-                </a:ln>
-                <a:effectLst/>
-              </c:spPr>
-            </c:leaderLines>
-            <c:extLst>
-              <c:ext xmlns:c15="http://schemas.microsoft.com/office/drawing/2012/chart" uri="{CE6537A1-D6FC-4f65-9D91-7224C49458BB}"/>
-            </c:extLst>
-          </c:dLbls>
-          <c:cat>
-            <c:strRef>
-              <c:f>'Awarie WORK2'!$S$1:$W$1</c:f>
-              <c:strCache>
-                <c:ptCount val="5"/>
-                <c:pt idx="0">
-                  <c:v>Procent awari</c:v>
-                </c:pt>
-                <c:pt idx="1">
-                  <c:v>Procent IT</c:v>
-                </c:pt>
-                <c:pt idx="2">
-                  <c:v>Procent Jakości</c:v>
-                </c:pt>
-                <c:pt idx="3">
-                  <c:v>Procent Ogólny</c:v>
-                </c:pt>
-                <c:pt idx="4">
-                  <c:v>Procent szkolenia</c:v>
-                </c:pt>
-              </c:strCache>
-            </c:strRef>
-          </c:cat>
-          <c:val>
-            <c:numRef>
-              <c:f>'Awarie WORK2'!$S$2:$W$2</c:f>
-              <c:numCache>
-                <c:formatCode>0.00</c:formatCode>
-                <c:ptCount val="5"/>
-                <c:pt idx="0">
-                  <c:v>81.989247311827967</c:v>
-                </c:pt>
-                <c:pt idx="1">
-                  <c:v>1.3440860215053763</c:v>
-                </c:pt>
-                <c:pt idx="2">
-                  <c:v>0.71684587813620071</c:v>
-                </c:pt>
-                <c:pt idx="3">
-                  <c:v>10.663082437275985</c:v>
-                </c:pt>
-                <c:pt idx="4">
-                  <c:v>5.2867383512544803</c:v>
-                </c:pt>
-              </c:numCache>
-            </c:numRef>
-          </c:val>
-          <c:extLst>
-            <c:ext xmlns:c16="http://schemas.microsoft.com/office/drawing/2014/chart" uri="{C3380CC4-5D6E-409C-BE32-E72D297353CC}">
-              <c16:uniqueId val="{0000000A-216B-4BD6-8A48-1EACE5785171}"/>
-            </c:ext>
-          </c:extLst>
-        </c:ser>
-        <c:dLbls>
-          <c:dLblPos val="bestFit"/>
-          <c:showLegendKey val="0"/>
-          <c:showVal val="1"/>
-          <c:showCatName val="0"/>
-          <c:showSerName val="0"/>
-          <c:showPercent val="0"/>
-          <c:showBubbleSize val="0"/>
-          <c:showLeaderLines val="1"/>
-        </c:dLbls>
-        <c:firstSliceAng val="0"/>
-      </c:pieChart>
-      <c:spPr>
-        <a:noFill/>
-        <a:ln>
-          <a:noFill/>
-        </a:ln>
-        <a:effectLst/>
-      </c:spPr>
-    </c:plotArea>
-    <c:legend>
-      <c:legendPos val="r"/>
-      <c:layout>
-        <c:manualLayout>
-          <c:xMode val="edge"/>
-          <c:yMode val="edge"/>
-          <c:x val="0.79893914873384408"/>
-          <c:y val="0.22557719883730915"/>
-          <c:w val="0.19017754219174704"/>
-          <c:h val="0.46939251246230335"/>
-        </c:manualLayout>
-      </c:layout>
-      <c:overlay val="0"/>
-      <c:spPr>
-        <a:noFill/>
-        <a:ln>
-          <a:noFill/>
-        </a:ln>
-        <a:effectLst/>
-      </c:spPr>
-      <c:txPr>
-        <a:bodyPr rot="0" spcFirstLastPara="1" vertOverflow="ellipsis" vert="horz" wrap="square" anchor="ctr" anchorCtr="1"/>
-        <a:lstStyle/>
-        <a:p>
-          <a:pPr>
-            <a:defRPr sz="1200" b="0" i="0" u="none" strike="noStrike" kern="1200" baseline="0">
-              <a:solidFill>
-                <a:schemeClr val="tx1">
-                  <a:lumMod val="65000"/>
-                  <a:lumOff val="35000"/>
-                </a:schemeClr>
-              </a:solidFill>
-              <a:latin typeface="+mn-lt"/>
-              <a:ea typeface="+mn-ea"/>
-              <a:cs typeface="+mn-cs"/>
-            </a:defRPr>
-          </a:pPr>
-          <a:endParaRPr lang="en-US"/>
-        </a:p>
-      </c:txPr>
-    </c:legend>
-    <c:plotVisOnly val="1"/>
-    <c:dispBlanksAs val="gap"/>
-    <c:showDLblsOverMax val="0"/>
-    <c:extLst>
-      <c:ext xmlns:c16r3="http://schemas.microsoft.com/office/drawing/2017/03/chart" uri="{56B9EC1D-385E-4148-901F-78D8002777C0}">
-        <c16r3:dataDisplayOptions16>
-          <c16r3:dispNaAsBlank val="1"/>
-        </c16r3:dataDisplayOptions16>
-      </c:ext>
-    </c:extLst>
-  </c:chart>
-  <c:spPr>
-    <a:noFill/>
-    <a:ln>
-      <a:noFill/>
-    </a:ln>
-    <a:effectLst/>
-  </c:spPr>
-  <c:txPr>
-    <a:bodyPr/>
-    <a:lstStyle/>
-    <a:p>
-      <a:pPr>
-        <a:defRPr/>
-      </a:pPr>
-      <a:endParaRPr lang="en-US"/>
-    </a:p>
-  </c:txPr>
-  <c:externalData r:id="rId3">
-    <c:autoUpdate val="0"/>
-  </c:externalData>
-</c:chartSpace>
-</file>
-
-<file path=ppt/charts/chart3.xml><?xml version="1.0" encoding="utf-8"?>
-<c:chartSpace xmlns:c="http://schemas.openxmlformats.org/drawingml/2006/chart" xmlns:a="http://schemas.openxmlformats.org/drawingml/2006/main" xmlns:r="http://schemas.openxmlformats.org/officeDocument/2006/relationships" xmlns:c16r2="http://schemas.microsoft.com/office/drawing/2015/06/chart">
-  <c:date1904 val="0"/>
-  <c:lang val="en-US"/>
-  <c:roundedCorners val="0"/>
-  <mc:AlternateContent xmlns:mc="http://schemas.openxmlformats.org/markup-compatibility/2006">
-    <mc:Choice xmlns:c14="http://schemas.microsoft.com/office/drawing/2007/8/2/chart" Requires="c14">
-      <c14:style val="102"/>
-    </mc:Choice>
-    <mc:Fallback>
-      <c:style val="2"/>
-    </mc:Fallback>
-  </mc:AlternateContent>
-  <c:chart>
-    <c:title>
-      <c:tx>
-        <c:rich>
-          <a:bodyPr rot="0" spcFirstLastPara="1" vertOverflow="ellipsis" vert="horz" wrap="square" anchor="ctr" anchorCtr="1"/>
-          <a:lstStyle/>
-          <a:p>
-            <a:pPr>
-              <a:defRPr sz="1400" b="0" i="0" u="none" strike="noStrike" kern="1200" spc="0" baseline="0">
-                <a:solidFill>
-                  <a:schemeClr val="tx1">
-                    <a:lumMod val="65000"/>
-                    <a:lumOff val="35000"/>
-                  </a:schemeClr>
-                </a:solidFill>
-                <a:latin typeface="+mn-lt"/>
-                <a:ea typeface="+mn-ea"/>
-                <a:cs typeface="+mn-cs"/>
-              </a:defRPr>
-            </a:pPr>
-            <a:r>
-              <a:rPr lang="pl-PL" sz="2800" dirty="0"/>
+              <a:rPr lang="pl-PL"/>
               <a:t>Czas stracony na przestoje [h]</a:t>
             </a:r>
-            <a:endParaRPr lang="en-US" sz="2800" dirty="0"/>
+            <a:endParaRPr lang="en-US"/>
           </a:p>
         </c:rich>
       </c:tx>
@@ -1113,7 +701,7 @@
             </c:spPr>
             <c:extLst>
               <c:ext xmlns:c16="http://schemas.microsoft.com/office/drawing/2014/chart" uri="{C3380CC4-5D6E-409C-BE32-E72D297353CC}">
-                <c16:uniqueId val="{00000001-EB23-4014-A71E-CC73053C1A0B}"/>
+                <c16:uniqueId val="{00000001-AA86-4120-B2B1-D55A17B7ABA7}"/>
               </c:ext>
             </c:extLst>
           </c:dPt>
@@ -1133,7 +721,7 @@
             </c:spPr>
             <c:extLst>
               <c:ext xmlns:c16="http://schemas.microsoft.com/office/drawing/2014/chart" uri="{C3380CC4-5D6E-409C-BE32-E72D297353CC}">
-                <c16:uniqueId val="{00000003-EB23-4014-A71E-CC73053C1A0B}"/>
+                <c16:uniqueId val="{00000003-AA86-4120-B2B1-D55A17B7ABA7}"/>
               </c:ext>
             </c:extLst>
           </c:dPt>
@@ -1153,7 +741,7 @@
             </c:spPr>
             <c:extLst>
               <c:ext xmlns:c16="http://schemas.microsoft.com/office/drawing/2014/chart" uri="{C3380CC4-5D6E-409C-BE32-E72D297353CC}">
-                <c16:uniqueId val="{00000005-EB23-4014-A71E-CC73053C1A0B}"/>
+                <c16:uniqueId val="{00000005-AA86-4120-B2B1-D55A17B7ABA7}"/>
               </c:ext>
             </c:extLst>
           </c:dPt>
@@ -1173,7 +761,7 @@
             </c:spPr>
             <c:extLst>
               <c:ext xmlns:c16="http://schemas.microsoft.com/office/drawing/2014/chart" uri="{C3380CC4-5D6E-409C-BE32-E72D297353CC}">
-                <c16:uniqueId val="{00000007-EB23-4014-A71E-CC73053C1A0B}"/>
+                <c16:uniqueId val="{00000007-AA86-4120-B2B1-D55A17B7ABA7}"/>
               </c:ext>
             </c:extLst>
           </c:dPt>
@@ -1193,7 +781,7 @@
             </c:spPr>
             <c:extLst>
               <c:ext xmlns:c16="http://schemas.microsoft.com/office/drawing/2014/chart" uri="{C3380CC4-5D6E-409C-BE32-E72D297353CC}">
-                <c16:uniqueId val="{00000009-EB23-4014-A71E-CC73053C1A0B}"/>
+                <c16:uniqueId val="{00000009-AA86-4120-B2B1-D55A17B7ABA7}"/>
               </c:ext>
             </c:extLst>
           </c:dPt>
@@ -1212,7 +800,7 @@
               <a:lstStyle/>
               <a:p>
                 <a:pPr>
-                  <a:defRPr sz="1800" b="1" i="0" u="none" strike="noStrike" kern="1200" baseline="0">
+                  <a:defRPr sz="1200" b="1" i="0" u="none" strike="noStrike" kern="1200" baseline="0">
                     <a:solidFill>
                       <a:schemeClr val="tx1">
                         <a:lumMod val="75000"/>
@@ -1255,7 +843,7 @@
           </c:dLbls>
           <c:cat>
             <c:strRef>
-              <c:f>'Awarie WORK2'!$N$3:$R$3</c:f>
+              <c:f>'Awarie WORK2'!$L$3:$P$3</c:f>
               <c:strCache>
                 <c:ptCount val="5"/>
                 <c:pt idx="0">
@@ -1278,31 +866,31 @@
           </c:cat>
           <c:val>
             <c:numRef>
-              <c:f>'Awarie WORK2'!$N$4:$R$4</c:f>
+              <c:f>'Awarie WORK2'!$L$4:$P$4</c:f>
               <c:numCache>
                 <c:formatCode>General</c:formatCode>
                 <c:ptCount val="5"/>
-                <c:pt idx="0">
-                  <c:v>30.5</c:v>
+                <c:pt idx="0" formatCode="0.00">
+                  <c:v>16.75</c:v>
                 </c:pt>
                 <c:pt idx="1">
-                  <c:v>0.5</c:v>
+                  <c:v>0.16666666666666666</c:v>
                 </c:pt>
                 <c:pt idx="2" formatCode="0.00">
-                  <c:v>0.26666666666666666</c:v>
+                  <c:v>8.3333333333333329E-2</c:v>
                 </c:pt>
                 <c:pt idx="3" formatCode="0.00">
-                  <c:v>3.9666666666666668</c:v>
+                  <c:v>5.4</c:v>
                 </c:pt>
                 <c:pt idx="4" formatCode="0.00">
-                  <c:v>1.9666666666666666</c:v>
+                  <c:v>1.25</c:v>
                 </c:pt>
               </c:numCache>
             </c:numRef>
           </c:val>
           <c:extLst>
             <c:ext xmlns:c16="http://schemas.microsoft.com/office/drawing/2014/chart" uri="{C3380CC4-5D6E-409C-BE32-E72D297353CC}">
-              <c16:uniqueId val="{0000000A-EB23-4014-A71E-CC73053C1A0B}"/>
+              <c16:uniqueId val="{0000000A-AA86-4120-B2B1-D55A17B7ABA7}"/>
             </c:ext>
           </c:extLst>
         </c:ser>
@@ -1332,10 +920,10 @@
         <c:manualLayout>
           <c:xMode val="edge"/>
           <c:yMode val="edge"/>
-          <c:x val="0.86433942581133805"/>
-          <c:y val="0.28430122056412938"/>
+          <c:x val="0.83497019635749037"/>
+          <c:y val="0.24170855084697448"/>
           <c:w val="0.12114151792731898"/>
-          <c:h val="0.4642336774196435"/>
+          <c:h val="0.58645590353687715"/>
         </c:manualLayout>
       </c:layout>
       <c:overlay val="0"/>
@@ -1351,7 +939,389 @@
         <a:lstStyle/>
         <a:p>
           <a:pPr>
-            <a:defRPr sz="1200" b="0" i="0" u="none" strike="noStrike" kern="1200" baseline="0">
+            <a:defRPr sz="2000" b="0" i="0" u="none" strike="noStrike" kern="1200" baseline="0">
+              <a:solidFill>
+                <a:schemeClr val="tx1">
+                  <a:lumMod val="65000"/>
+                  <a:lumOff val="35000"/>
+                </a:schemeClr>
+              </a:solidFill>
+              <a:latin typeface="+mn-lt"/>
+              <a:ea typeface="+mn-ea"/>
+              <a:cs typeface="+mn-cs"/>
+            </a:defRPr>
+          </a:pPr>
+          <a:endParaRPr lang="en-US"/>
+        </a:p>
+      </c:txPr>
+    </c:legend>
+    <c:plotVisOnly val="1"/>
+    <c:dispBlanksAs val="gap"/>
+    <c:showDLblsOverMax val="0"/>
+    <c:extLst>
+      <c:ext xmlns:c16r3="http://schemas.microsoft.com/office/drawing/2017/03/chart" uri="{56B9EC1D-385E-4148-901F-78D8002777C0}">
+        <c16r3:dataDisplayOptions16>
+          <c16r3:dispNaAsBlank val="1"/>
+        </c16r3:dataDisplayOptions16>
+      </c:ext>
+    </c:extLst>
+  </c:chart>
+  <c:spPr>
+    <a:noFill/>
+    <a:ln>
+      <a:noFill/>
+    </a:ln>
+    <a:effectLst/>
+  </c:spPr>
+  <c:txPr>
+    <a:bodyPr/>
+    <a:lstStyle/>
+    <a:p>
+      <a:pPr>
+        <a:defRPr/>
+      </a:pPr>
+      <a:endParaRPr lang="en-US"/>
+    </a:p>
+  </c:txPr>
+  <c:externalData r:id="rId3">
+    <c:autoUpdate val="0"/>
+  </c:externalData>
+</c:chartSpace>
+</file>
+
+<file path=ppt/charts/chart3.xml><?xml version="1.0" encoding="utf-8"?>
+<c:chartSpace xmlns:c="http://schemas.openxmlformats.org/drawingml/2006/chart" xmlns:a="http://schemas.openxmlformats.org/drawingml/2006/main" xmlns:r="http://schemas.openxmlformats.org/officeDocument/2006/relationships" xmlns:c16r2="http://schemas.microsoft.com/office/drawing/2015/06/chart">
+  <c:date1904 val="0"/>
+  <c:lang val="pl-PL"/>
+  <c:roundedCorners val="0"/>
+  <mc:AlternateContent xmlns:mc="http://schemas.openxmlformats.org/markup-compatibility/2006">
+    <mc:Choice xmlns:c14="http://schemas.microsoft.com/office/drawing/2007/8/2/chart" Requires="c14">
+      <c14:style val="102"/>
+    </mc:Choice>
+    <mc:Fallback>
+      <c:style val="2"/>
+    </mc:Fallback>
+  </mc:AlternateContent>
+  <c:chart>
+    <c:title>
+      <c:tx>
+        <c:rich>
+          <a:bodyPr rot="0" spcFirstLastPara="1" vertOverflow="ellipsis" vert="horz" wrap="square" anchor="ctr" anchorCtr="1"/>
+          <a:lstStyle/>
+          <a:p>
+            <a:pPr>
+              <a:defRPr sz="1400" b="0" i="0" u="none" strike="noStrike" kern="1200" spc="0" baseline="0">
+                <a:solidFill>
+                  <a:schemeClr val="tx1">
+                    <a:lumMod val="65000"/>
+                    <a:lumOff val="35000"/>
+                  </a:schemeClr>
+                </a:solidFill>
+                <a:latin typeface="+mn-lt"/>
+                <a:ea typeface="+mn-ea"/>
+                <a:cs typeface="+mn-cs"/>
+              </a:defRPr>
+            </a:pPr>
+            <a:r>
+              <a:rPr lang="pl-PL"/>
+              <a:t>Procentowy podział czasu straconego na przestoje</a:t>
+            </a:r>
+            <a:endParaRPr lang="en-US"/>
+          </a:p>
+        </c:rich>
+      </c:tx>
+      <c:overlay val="0"/>
+      <c:spPr>
+        <a:noFill/>
+        <a:ln>
+          <a:noFill/>
+        </a:ln>
+        <a:effectLst/>
+      </c:spPr>
+      <c:txPr>
+        <a:bodyPr rot="0" spcFirstLastPara="1" vertOverflow="ellipsis" vert="horz" wrap="square" anchor="ctr" anchorCtr="1"/>
+        <a:lstStyle/>
+        <a:p>
+          <a:pPr>
+            <a:defRPr sz="1400" b="0" i="0" u="none" strike="noStrike" kern="1200" spc="0" baseline="0">
+              <a:solidFill>
+                <a:schemeClr val="tx1">
+                  <a:lumMod val="65000"/>
+                  <a:lumOff val="35000"/>
+                </a:schemeClr>
+              </a:solidFill>
+              <a:latin typeface="+mn-lt"/>
+              <a:ea typeface="+mn-ea"/>
+              <a:cs typeface="+mn-cs"/>
+            </a:defRPr>
+          </a:pPr>
+          <a:endParaRPr lang="en-US"/>
+        </a:p>
+      </c:txPr>
+    </c:title>
+    <c:autoTitleDeleted val="0"/>
+    <c:plotArea>
+      <c:layout/>
+      <c:pieChart>
+        <c:varyColors val="1"/>
+        <c:ser>
+          <c:idx val="0"/>
+          <c:order val="0"/>
+          <c:dPt>
+            <c:idx val="0"/>
+            <c:bubble3D val="0"/>
+            <c:spPr>
+              <a:solidFill>
+                <a:schemeClr val="accent1"/>
+              </a:solidFill>
+              <a:ln w="19050">
+                <a:solidFill>
+                  <a:schemeClr val="lt1"/>
+                </a:solidFill>
+              </a:ln>
+              <a:effectLst/>
+            </c:spPr>
+            <c:extLst>
+              <c:ext xmlns:c16="http://schemas.microsoft.com/office/drawing/2014/chart" uri="{C3380CC4-5D6E-409C-BE32-E72D297353CC}">
+                <c16:uniqueId val="{00000001-5684-410A-8930-05B6EF642272}"/>
+              </c:ext>
+            </c:extLst>
+          </c:dPt>
+          <c:dPt>
+            <c:idx val="1"/>
+            <c:bubble3D val="0"/>
+            <c:spPr>
+              <a:solidFill>
+                <a:schemeClr val="accent2"/>
+              </a:solidFill>
+              <a:ln w="19050">
+                <a:solidFill>
+                  <a:schemeClr val="lt1"/>
+                </a:solidFill>
+              </a:ln>
+              <a:effectLst/>
+            </c:spPr>
+            <c:extLst>
+              <c:ext xmlns:c16="http://schemas.microsoft.com/office/drawing/2014/chart" uri="{C3380CC4-5D6E-409C-BE32-E72D297353CC}">
+                <c16:uniqueId val="{00000003-5684-410A-8930-05B6EF642272}"/>
+              </c:ext>
+            </c:extLst>
+          </c:dPt>
+          <c:dPt>
+            <c:idx val="2"/>
+            <c:bubble3D val="0"/>
+            <c:spPr>
+              <a:solidFill>
+                <a:schemeClr val="accent3"/>
+              </a:solidFill>
+              <a:ln w="19050">
+                <a:solidFill>
+                  <a:schemeClr val="lt1"/>
+                </a:solidFill>
+              </a:ln>
+              <a:effectLst/>
+            </c:spPr>
+            <c:extLst>
+              <c:ext xmlns:c16="http://schemas.microsoft.com/office/drawing/2014/chart" uri="{C3380CC4-5D6E-409C-BE32-E72D297353CC}">
+                <c16:uniqueId val="{00000005-5684-410A-8930-05B6EF642272}"/>
+              </c:ext>
+            </c:extLst>
+          </c:dPt>
+          <c:dPt>
+            <c:idx val="3"/>
+            <c:bubble3D val="0"/>
+            <c:spPr>
+              <a:solidFill>
+                <a:schemeClr val="accent4"/>
+              </a:solidFill>
+              <a:ln w="19050">
+                <a:solidFill>
+                  <a:schemeClr val="lt1"/>
+                </a:solidFill>
+              </a:ln>
+              <a:effectLst/>
+            </c:spPr>
+            <c:extLst>
+              <c:ext xmlns:c16="http://schemas.microsoft.com/office/drawing/2014/chart" uri="{C3380CC4-5D6E-409C-BE32-E72D297353CC}">
+                <c16:uniqueId val="{00000007-5684-410A-8930-05B6EF642272}"/>
+              </c:ext>
+            </c:extLst>
+          </c:dPt>
+          <c:dPt>
+            <c:idx val="4"/>
+            <c:bubble3D val="0"/>
+            <c:spPr>
+              <a:solidFill>
+                <a:schemeClr val="accent5"/>
+              </a:solidFill>
+              <a:ln w="19050">
+                <a:solidFill>
+                  <a:schemeClr val="lt1"/>
+                </a:solidFill>
+              </a:ln>
+              <a:effectLst/>
+            </c:spPr>
+            <c:extLst>
+              <c:ext xmlns:c16="http://schemas.microsoft.com/office/drawing/2014/chart" uri="{C3380CC4-5D6E-409C-BE32-E72D297353CC}">
+                <c16:uniqueId val="{00000009-5684-410A-8930-05B6EF642272}"/>
+              </c:ext>
+            </c:extLst>
+          </c:dPt>
+          <c:dLbls>
+            <c:spPr>
+              <a:noFill/>
+              <a:ln>
+                <a:noFill/>
+              </a:ln>
+              <a:effectLst/>
+            </c:spPr>
+            <c:txPr>
+              <a:bodyPr rot="0" spcFirstLastPara="1" vertOverflow="ellipsis" vert="horz" wrap="square" lIns="38100" tIns="19050" rIns="38100" bIns="19050" anchor="ctr" anchorCtr="1">
+                <a:spAutoFit/>
+              </a:bodyPr>
+              <a:lstStyle/>
+              <a:p>
+                <a:pPr>
+                  <a:defRPr sz="900" b="0" i="0" u="none" strike="noStrike" kern="1200" baseline="0">
+                    <a:solidFill>
+                      <a:schemeClr val="tx1">
+                        <a:lumMod val="75000"/>
+                        <a:lumOff val="25000"/>
+                      </a:schemeClr>
+                    </a:solidFill>
+                    <a:latin typeface="+mn-lt"/>
+                    <a:ea typeface="+mn-ea"/>
+                    <a:cs typeface="+mn-cs"/>
+                  </a:defRPr>
+                </a:pPr>
+                <a:endParaRPr lang="en-US"/>
+              </a:p>
+            </c:txPr>
+            <c:dLblPos val="bestFit"/>
+            <c:showLegendKey val="0"/>
+            <c:showVal val="1"/>
+            <c:showCatName val="0"/>
+            <c:showSerName val="0"/>
+            <c:showPercent val="0"/>
+            <c:showBubbleSize val="0"/>
+            <c:showLeaderLines val="1"/>
+            <c:leaderLines>
+              <c:spPr>
+                <a:ln w="9525" cap="flat" cmpd="sng" algn="ctr">
+                  <a:solidFill>
+                    <a:schemeClr val="tx1">
+                      <a:lumMod val="35000"/>
+                      <a:lumOff val="65000"/>
+                    </a:schemeClr>
+                  </a:solidFill>
+                  <a:round/>
+                </a:ln>
+                <a:effectLst/>
+              </c:spPr>
+            </c:leaderLines>
+            <c:extLst>
+              <c:ext xmlns:c15="http://schemas.microsoft.com/office/drawing/2012/chart" uri="{CE6537A1-D6FC-4f65-9D91-7224C49458BB}"/>
+            </c:extLst>
+          </c:dLbls>
+          <c:cat>
+            <c:strRef>
+              <c:f>'Awarie WORK2'!$Q$1:$U$1</c:f>
+              <c:strCache>
+                <c:ptCount val="5"/>
+                <c:pt idx="0">
+                  <c:v>Procent awari</c:v>
+                </c:pt>
+                <c:pt idx="1">
+                  <c:v>Procent IT</c:v>
+                </c:pt>
+                <c:pt idx="2">
+                  <c:v>Procent Jakości</c:v>
+                </c:pt>
+                <c:pt idx="3">
+                  <c:v>Procent Ogólny</c:v>
+                </c:pt>
+                <c:pt idx="4">
+                  <c:v>Procent szkolenia</c:v>
+                </c:pt>
+              </c:strCache>
+            </c:strRef>
+          </c:cat>
+          <c:val>
+            <c:numRef>
+              <c:f>'Awarie WORK2'!$Q$2:$U$2</c:f>
+              <c:numCache>
+                <c:formatCode>0.00</c:formatCode>
+                <c:ptCount val="5"/>
+                <c:pt idx="0">
+                  <c:v>53.887399463806972</c:v>
+                </c:pt>
+                <c:pt idx="1">
+                  <c:v>0.53619302949061665</c:v>
+                </c:pt>
+                <c:pt idx="2">
+                  <c:v>0.26809651474530832</c:v>
+                </c:pt>
+                <c:pt idx="3">
+                  <c:v>17.372654155495979</c:v>
+                </c:pt>
+                <c:pt idx="4">
+                  <c:v>4.0214477211796247</c:v>
+                </c:pt>
+              </c:numCache>
+            </c:numRef>
+          </c:val>
+          <c:extLst>
+            <c:ext xmlns:c16="http://schemas.microsoft.com/office/drawing/2014/chart" uri="{C3380CC4-5D6E-409C-BE32-E72D297353CC}">
+              <c16:uniqueId val="{0000000A-5684-410A-8930-05B6EF642272}"/>
+            </c:ext>
+          </c:extLst>
+        </c:ser>
+        <c:dLbls>
+          <c:dLblPos val="bestFit"/>
+          <c:showLegendKey val="0"/>
+          <c:showVal val="1"/>
+          <c:showCatName val="0"/>
+          <c:showSerName val="0"/>
+          <c:showPercent val="0"/>
+          <c:showBubbleSize val="0"/>
+          <c:showLeaderLines val="1"/>
+        </c:dLbls>
+        <c:firstSliceAng val="0"/>
+      </c:pieChart>
+      <c:spPr>
+        <a:noFill/>
+        <a:ln>
+          <a:noFill/>
+        </a:ln>
+        <a:effectLst/>
+      </c:spPr>
+    </c:plotArea>
+    <c:legend>
+      <c:legendPos val="b"/>
+      <c:layout>
+        <c:manualLayout>
+          <c:xMode val="edge"/>
+          <c:yMode val="edge"/>
+          <c:x val="0.73181171766572328"/>
+          <c:y val="0.14966028552709745"/>
+          <c:w val="0.20684360200284996"/>
+          <c:h val="0.83904233832557762"/>
+        </c:manualLayout>
+      </c:layout>
+      <c:overlay val="0"/>
+      <c:spPr>
+        <a:noFill/>
+        <a:ln>
+          <a:noFill/>
+        </a:ln>
+        <a:effectLst/>
+      </c:spPr>
+      <c:txPr>
+        <a:bodyPr rot="0" spcFirstLastPara="1" vertOverflow="ellipsis" vert="horz" wrap="square" anchor="ctr" anchorCtr="1"/>
+        <a:lstStyle/>
+        <a:p>
+          <a:pPr>
+            <a:defRPr sz="2000" b="0" i="0" u="none" strike="noStrike" kern="1200" baseline="0">
               <a:solidFill>
                 <a:schemeClr val="tx1">
                   <a:lumMod val="65000"/>
@@ -1404,7 +1374,7 @@
 <file path=ppt/charts/chart4.xml><?xml version="1.0" encoding="utf-8"?>
 <c:chartSpace xmlns:c="http://schemas.openxmlformats.org/drawingml/2006/chart" xmlns:a="http://schemas.openxmlformats.org/drawingml/2006/main" xmlns:r="http://schemas.openxmlformats.org/officeDocument/2006/relationships" xmlns:c16r2="http://schemas.microsoft.com/office/drawing/2015/06/chart">
   <c:date1904 val="0"/>
-  <c:lang val="en-US"/>
+  <c:lang val="pl-PL"/>
   <c:roundedCorners val="0"/>
   <mc:AlternateContent xmlns:mc="http://schemas.openxmlformats.org/markup-compatibility/2006">
     <mc:Choice xmlns:c14="http://schemas.microsoft.com/office/drawing/2007/8/2/chart" Requires="c14">
@@ -4901,7 +4871,7 @@
           <a:p>
             <a:fld id="{3D9432A8-67B2-4540-89F6-313E0AD6D97C}" type="datetimeFigureOut">
               <a:rPr lang="en-US" smtClean="0"/>
-              <a:t>5/9/2026</a:t>
+              <a:t>6/2/2026</a:t>
             </a:fld>
             <a:endParaRPr lang="en-US"/>
           </a:p>
@@ -5176,7 +5146,7 @@
           <a:p>
             <a:fld id="{3D9432A8-67B2-4540-89F6-313E0AD6D97C}" type="datetimeFigureOut">
               <a:rPr lang="en-US" smtClean="0"/>
-              <a:t>5/9/2026</a:t>
+              <a:t>6/2/2026</a:t>
             </a:fld>
             <a:endParaRPr lang="en-US"/>
           </a:p>
@@ -5370,7 +5340,7 @@
           <a:p>
             <a:fld id="{3D9432A8-67B2-4540-89F6-313E0AD6D97C}" type="datetimeFigureOut">
               <a:rPr lang="en-US" smtClean="0"/>
-              <a:t>5/9/2026</a:t>
+              <a:t>6/2/2026</a:t>
             </a:fld>
             <a:endParaRPr lang="en-US"/>
           </a:p>
@@ -5643,7 +5613,7 @@
           <a:p>
             <a:fld id="{3D9432A8-67B2-4540-89F6-313E0AD6D97C}" type="datetimeFigureOut">
               <a:rPr lang="en-US" smtClean="0"/>
-              <a:t>5/9/2026</a:t>
+              <a:t>6/2/2026</a:t>
             </a:fld>
             <a:endParaRPr lang="en-US"/>
           </a:p>
@@ -5984,7 +5954,7 @@
           <a:p>
             <a:fld id="{3D9432A8-67B2-4540-89F6-313E0AD6D97C}" type="datetimeFigureOut">
               <a:rPr lang="en-US" smtClean="0"/>
-              <a:t>5/9/2026</a:t>
+              <a:t>6/2/2026</a:t>
             </a:fld>
             <a:endParaRPr lang="en-US"/>
           </a:p>
@@ -6607,7 +6577,7 @@
           <a:p>
             <a:fld id="{3D9432A8-67B2-4540-89F6-313E0AD6D97C}" type="datetimeFigureOut">
               <a:rPr lang="en-US" smtClean="0"/>
-              <a:t>5/9/2026</a:t>
+              <a:t>6/2/2026</a:t>
             </a:fld>
             <a:endParaRPr lang="en-US"/>
           </a:p>
@@ -7467,7 +7437,7 @@
           <a:p>
             <a:fld id="{3D9432A8-67B2-4540-89F6-313E0AD6D97C}" type="datetimeFigureOut">
               <a:rPr lang="en-US" smtClean="0"/>
-              <a:t>5/9/2026</a:t>
+              <a:t>6/2/2026</a:t>
             </a:fld>
             <a:endParaRPr lang="en-US"/>
           </a:p>
@@ -7637,7 +7607,7 @@
           <a:p>
             <a:fld id="{3D9432A8-67B2-4540-89F6-313E0AD6D97C}" type="datetimeFigureOut">
               <a:rPr lang="en-US" smtClean="0"/>
-              <a:t>5/9/2026</a:t>
+              <a:t>6/2/2026</a:t>
             </a:fld>
             <a:endParaRPr lang="en-US"/>
           </a:p>
@@ -7817,7 +7787,7 @@
           <a:p>
             <a:fld id="{3D9432A8-67B2-4540-89F6-313E0AD6D97C}" type="datetimeFigureOut">
               <a:rPr lang="en-US" smtClean="0"/>
-              <a:t>5/9/2026</a:t>
+              <a:t>6/2/2026</a:t>
             </a:fld>
             <a:endParaRPr lang="en-US"/>
           </a:p>
@@ -7987,7 +7957,7 @@
           <a:p>
             <a:fld id="{3D9432A8-67B2-4540-89F6-313E0AD6D97C}" type="datetimeFigureOut">
               <a:rPr lang="en-US" smtClean="0"/>
-              <a:t>5/9/2026</a:t>
+              <a:t>6/2/2026</a:t>
             </a:fld>
             <a:endParaRPr lang="en-US"/>
           </a:p>
@@ -8234,7 +8204,7 @@
           <a:p>
             <a:fld id="{3D9432A8-67B2-4540-89F6-313E0AD6D97C}" type="datetimeFigureOut">
               <a:rPr lang="en-US" smtClean="0"/>
-              <a:t>5/9/2026</a:t>
+              <a:t>6/2/2026</a:t>
             </a:fld>
             <a:endParaRPr lang="en-US"/>
           </a:p>
@@ -8526,7 +8496,7 @@
           <a:p>
             <a:fld id="{3D9432A8-67B2-4540-89F6-313E0AD6D97C}" type="datetimeFigureOut">
               <a:rPr lang="en-US" smtClean="0"/>
-              <a:t>5/9/2026</a:t>
+              <a:t>6/2/2026</a:t>
             </a:fld>
             <a:endParaRPr lang="en-US"/>
           </a:p>
@@ -8970,7 +8940,7 @@
           <a:p>
             <a:fld id="{3D9432A8-67B2-4540-89F6-313E0AD6D97C}" type="datetimeFigureOut">
               <a:rPr lang="en-US" smtClean="0"/>
-              <a:t>5/9/2026</a:t>
+              <a:t>6/2/2026</a:t>
             </a:fld>
             <a:endParaRPr lang="en-US"/>
           </a:p>
@@ -9088,7 +9058,7 @@
           <a:p>
             <a:fld id="{3D9432A8-67B2-4540-89F6-313E0AD6D97C}" type="datetimeFigureOut">
               <a:rPr lang="en-US" smtClean="0"/>
-              <a:t>5/9/2026</a:t>
+              <a:t>6/2/2026</a:t>
             </a:fld>
             <a:endParaRPr lang="en-US"/>
           </a:p>
@@ -9183,7 +9153,7 @@
           <a:p>
             <a:fld id="{3D9432A8-67B2-4540-89F6-313E0AD6D97C}" type="datetimeFigureOut">
               <a:rPr lang="en-US" smtClean="0"/>
-              <a:t>5/9/2026</a:t>
+              <a:t>6/2/2026</a:t>
             </a:fld>
             <a:endParaRPr lang="en-US"/>
           </a:p>
@@ -9462,7 +9432,7 @@
           <a:p>
             <a:fld id="{3D9432A8-67B2-4540-89F6-313E0AD6D97C}" type="datetimeFigureOut">
               <a:rPr lang="en-US" smtClean="0"/>
-              <a:t>5/9/2026</a:t>
+              <a:t>6/2/2026</a:t>
             </a:fld>
             <a:endParaRPr lang="en-US"/>
           </a:p>
@@ -9737,7 +9707,7 @@
           <a:p>
             <a:fld id="{3D9432A8-67B2-4540-89F6-313E0AD6D97C}" type="datetimeFigureOut">
               <a:rPr lang="en-US" smtClean="0"/>
-              <a:t>5/9/2026</a:t>
+              <a:t>6/2/2026</a:t>
             </a:fld>
             <a:endParaRPr lang="en-US"/>
           </a:p>
@@ -10166,7 +10136,7 @@
           <a:p>
             <a:fld id="{3D9432A8-67B2-4540-89F6-313E0AD6D97C}" type="datetimeFigureOut">
               <a:rPr lang="en-US" smtClean="0"/>
-              <a:t>5/9/2026</a:t>
+              <a:t>6/2/2026</a:t>
             </a:fld>
             <a:endParaRPr lang="en-US"/>
           </a:p>
@@ -10780,7 +10750,7 @@
       </p:grpSpPr>
       <p:graphicFrame>
         <p:nvGraphicFramePr>
-          <p:cNvPr id="3" name="Chart 2">
+          <p:cNvPr id="2" name="Chart 1">
             <a:extLst>
               <a:ext uri="{FF2B5EF4-FFF2-40B4-BE49-F238E27FC236}">
                 <a16:creationId xmlns:a16="http://schemas.microsoft.com/office/drawing/2014/main" id="{6EB71755-17D0-E601-B947-85645F51CBDF}"/>
@@ -10793,14 +10763,14 @@
           <p:nvPr>
             <p:extLst>
               <p:ext uri="{D42A27DB-BD31-4B8C-83A1-F6EECF244321}">
-                <p14:modId xmlns:p14="http://schemas.microsoft.com/office/powerpoint/2010/main" val="3020902770"/>
+                <p14:modId xmlns:p14="http://schemas.microsoft.com/office/powerpoint/2010/main" val="2103455326"/>
               </p:ext>
             </p:extLst>
           </p:nvPr>
         </p:nvGraphicFramePr>
         <p:xfrm>
-          <a:off x="490601" y="393291"/>
-          <a:ext cx="11210797" cy="6056670"/>
+          <a:off x="490353" y="589936"/>
+          <a:ext cx="11211293" cy="5447070"/>
         </p:xfrm>
         <a:graphic>
           <a:graphicData uri="http://schemas.openxmlformats.org/drawingml/2006/chart">
@@ -10840,10 +10810,10 @@
       </p:grpSpPr>
       <p:graphicFrame>
         <p:nvGraphicFramePr>
-          <p:cNvPr id="4" name="Chart 3">
+          <p:cNvPr id="3" name="Chart 3">
             <a:extLst>
               <a:ext uri="{FF2B5EF4-FFF2-40B4-BE49-F238E27FC236}">
-                <a16:creationId xmlns:a16="http://schemas.microsoft.com/office/drawing/2014/main" id="{B32DF91E-1077-423D-AD10-4933BBAFBF48}"/>
+                <a16:creationId xmlns:a16="http://schemas.microsoft.com/office/drawing/2014/main" id="{039AE0CE-F38F-487D-6B57-8EA272894EEB}"/>
               </a:ext>
             </a:extLst>
           </p:cNvPr>
@@ -10853,14 +10823,14 @@
           <p:nvPr>
             <p:extLst>
               <p:ext uri="{D42A27DB-BD31-4B8C-83A1-F6EECF244321}">
-                <p14:modId xmlns:p14="http://schemas.microsoft.com/office/powerpoint/2010/main" val="3768975195"/>
+                <p14:modId xmlns:p14="http://schemas.microsoft.com/office/powerpoint/2010/main" val="3626428543"/>
               </p:ext>
             </p:extLst>
           </p:nvPr>
         </p:nvGraphicFramePr>
         <p:xfrm>
-          <a:off x="2276272" y="817124"/>
-          <a:ext cx="7702378" cy="5431032"/>
+          <a:off x="1" y="0"/>
+          <a:ext cx="12107916" cy="6857999"/>
         </p:xfrm>
         <a:graphic>
           <a:graphicData uri="http://schemas.openxmlformats.org/drawingml/2006/chart">
@@ -10900,10 +10870,10 @@
       </p:grpSpPr>
       <p:graphicFrame>
         <p:nvGraphicFramePr>
-          <p:cNvPr id="7" name="Chart 6">
+          <p:cNvPr id="2" name="Chart 2">
             <a:extLst>
               <a:ext uri="{FF2B5EF4-FFF2-40B4-BE49-F238E27FC236}">
-                <a16:creationId xmlns:a16="http://schemas.microsoft.com/office/drawing/2014/main" id="{039AE0CE-F38F-487D-6B57-8EA272894EEB}"/>
+                <a16:creationId xmlns:a16="http://schemas.microsoft.com/office/drawing/2014/main" id="{794AF52E-C86A-5BE0-0F8B-50F72D6793B0}"/>
               </a:ext>
             </a:extLst>
           </p:cNvPr>
@@ -10913,14 +10883,14 @@
           <p:nvPr>
             <p:extLst>
               <p:ext uri="{D42A27DB-BD31-4B8C-83A1-F6EECF244321}">
-                <p14:modId xmlns:p14="http://schemas.microsoft.com/office/powerpoint/2010/main" val="993887027"/>
+                <p14:modId xmlns:p14="http://schemas.microsoft.com/office/powerpoint/2010/main" val="1702558313"/>
               </p:ext>
             </p:extLst>
           </p:nvPr>
         </p:nvGraphicFramePr>
         <p:xfrm>
-          <a:off x="1896894" y="554477"/>
-          <a:ext cx="7675123" cy="5713742"/>
+          <a:off x="68826" y="0"/>
+          <a:ext cx="11857703" cy="6744929"/>
         </p:xfrm>
         <a:graphic>
           <a:graphicData uri="http://schemas.openxmlformats.org/drawingml/2006/chart">
@@ -11010,21 +10980,13 @@
           <a:p>
             <a:r>
               <a:rPr lang="pl-PL" dirty="0"/>
-              <a:t>FPY dla ponad połowy zmian </a:t>
+              <a:t>FPY dla tylko jednej z dwudziestu jeden zmian wynosił poniżej 90% co pokazuje, że nie jest to kluczowy problem, lecz jest tu możliwość do poprawy i dalszego doskonalenia. </a:t>
             </a:r>
-            <a:r>
-              <a:rPr lang="pl-PL" dirty="0" err="1"/>
-              <a:t>wynosiłpowyżej</a:t>
-            </a:r>
+          </a:p>
+          <a:p>
             <a:r>
               <a:rPr lang="pl-PL" dirty="0"/>
-              <a:t> 90% co pokazuje, że nie jest to kluczowy problem, lecz jest tu możliwość do poprawy i dalszego doskonalenia. </a:t>
-            </a:r>
-          </a:p>
-          <a:p>
-            <a:r>
-              <a:rPr lang="pl-PL" dirty="0"/>
-              <a:t>Prawie 82% czasu poświęconego na przestoje linii jest generowane przez awarie i serwisy i jest to główna przyczyna przestojów linii którą należało by zająć się w pierwszej kolejności</a:t>
+              <a:t>Ponad 66% czasu poświęconego na przestoje linii jest generowane przez awarie i serwisy (sumarycznie opisane jako awarie) i jest to główna przyczyna przestojów linii którą należało by zająć się w pierwszej kolejności</a:t>
             </a:r>
             <a:endParaRPr lang="en-US" dirty="0"/>
           </a:p>
